--- a/assets/kit/billtracking-mini-deck.pptx
+++ b/assets/kit/billtracking-mini-deck.pptx
@@ -4966,7 +4966,7 @@
                 </a:solidFill>
                 <a:latin typeface="Segoe UI"/>
               </a:rPr>
-              <a:t>Classroom check: open the OEIL procedure file and compare. Plain-English summaries are AI-written and always labeled [AI-Generated]; dates, names and tallies never are.</a:t>
+              <a:t>Classroom check: open the OEIL procedure file and compare. A summary, when a post carries one, is the legislature’s own official summary, quoted word for word; nothing in a post is written by AI.</a:t>
             </a:r>
           </a:p>
         </p:txBody>
